--- a/submission_files/OmniCare_AI_Presentation.pptx
+++ b/submission_files/OmniCare_AI_Presentation.pptx
@@ -5383,7 +5383,7 @@
           <a:p>
             <a:pPr>
               <a:spcBef>
-                <a:spcPts val="600"/>
+                <a:spcPts val="500"/>
               </a:spcBef>
             </a:pPr>
             <a:r>
@@ -5393,22 +5393,31 @@
                 </a:solidFill>
                 <a:latin typeface="Segoe UI"/>
               </a:rPr>
-              <a:t>✓ Sub-15ms Multimodal Latency         </a:t>
+              <a:t>[PASS] </a:t>
             </a:r>
             <a:r>
               <a:rPr b="1" sz="950">
                 <a:solidFill>
-                  <a:srgbClr val="00E5FF"/>
+                  <a:srgbClr val="F1F5F9"/>
                 </a:solidFill>
                 <a:latin typeface="Segoe UI"/>
               </a:rPr>
-              <a:t>✓ 26+ Hours Off-Grid Battery</a:t>
+              <a:t>Sub-15ms Multimodal Latency   •   </a:t>
+            </a:r>
+            <a:r>
+              <a:rPr b="1" sz="950">
+                <a:solidFill>
+                  <a:srgbClr val="00E5FF"/>
+                </a:solidFill>
+                <a:latin typeface="Segoe UI"/>
+              </a:rPr>
+              <a:t>26+ Hours Off-Grid Battery</a:t>
             </a:r>
           </a:p>
           <a:p>
             <a:pPr>
               <a:spcBef>
-                <a:spcPts val="600"/>
+                <a:spcPts val="500"/>
               </a:spcBef>
             </a:pPr>
             <a:r>
@@ -5418,22 +5427,31 @@
                 </a:solidFill>
                 <a:latin typeface="Segoe UI"/>
               </a:rPr>
-              <a:t>✓ DPDP Act 2023 Compliant             </a:t>
+              <a:t>[PASS] </a:t>
             </a:r>
             <a:r>
               <a:rPr b="1" sz="950">
                 <a:solidFill>
-                  <a:srgbClr val="00E5FF"/>
+                  <a:srgbClr val="F1F5F9"/>
                 </a:solidFill>
                 <a:latin typeface="Segoe UI"/>
               </a:rPr>
-              <a:t>✓ 82.9% Jan Aushadhi Savings</a:t>
+              <a:t>DPDP Act 2023 Compliant   •   </a:t>
+            </a:r>
+            <a:r>
+              <a:rPr b="1" sz="950">
+                <a:solidFill>
+                  <a:srgbClr val="00E5FF"/>
+                </a:solidFill>
+                <a:latin typeface="Segoe UI"/>
+              </a:rPr>
+              <a:t>82.9% Jan Aushadhi Savings</a:t>
             </a:r>
           </a:p>
           <a:p>
             <a:pPr>
               <a:spcBef>
-                <a:spcPts val="600"/>
+                <a:spcPts val="500"/>
               </a:spcBef>
             </a:pPr>
             <a:r>
@@ -5443,16 +5461,25 @@
                 </a:solidFill>
                 <a:latin typeface="Segoe UI"/>
               </a:rPr>
-              <a:t>✓ 35/35 Quality Gates PASS            </a:t>
+              <a:t>[PASS] </a:t>
             </a:r>
             <a:r>
               <a:rPr b="1" sz="950">
                 <a:solidFill>
-                  <a:srgbClr val="00E5FF"/>
+                  <a:srgbClr val="F1F5F9"/>
                 </a:solidFill>
                 <a:latin typeface="Segoe UI"/>
               </a:rPr>
-              <a:t>✓ 100% Offline Standalone Resilience</a:t>
+              <a:t>35/35 Quality Gates PASS   •   </a:t>
+            </a:r>
+            <a:r>
+              <a:rPr b="1" sz="950">
+                <a:solidFill>
+                  <a:srgbClr val="00E5FF"/>
+                </a:solidFill>
+                <a:latin typeface="Segoe UI"/>
+              </a:rPr>
+              <a:t>100% Offline Standalone Resilience</a:t>
             </a:r>
           </a:p>
         </p:txBody>
@@ -5696,7 +5723,7 @@
                 </a:solidFill>
                 <a:latin typeface="Segoe UI"/>
               </a:rPr>
-              <a:t>⚡ Qualcomm Snapdragon® X Elite (12-Core Oryon) • 45.0 TOPS Hexagon NPU</a:t>
+              <a:t>• Qualcomm Snapdragon® X Elite (12-Core Oryon) • 45.0 TOPS Hexagon NPU</a:t>
             </a:r>
           </a:p>
           <a:p>
@@ -5712,7 +5739,7 @@
                 </a:solidFill>
                 <a:latin typeface="Segoe UI"/>
               </a:rPr>
-              <a:t>🔒 HP Wolf Security Hardware Enclave (AES-256-GCM) • 26+ Hours Battery</a:t>
+              <a:t>• HP Wolf Security Hardware Enclave (AES-256-GCM) • 26+ Hours Battery</a:t>
             </a:r>
           </a:p>
         </p:txBody>
@@ -6335,9 +6362,9 @@
                     <a:lstStyle/>
                     <a:p>
                       <a:r>
-                        <a:rPr sz="950">
+                        <a:rPr sz="950" b="1">
                           <a:solidFill>
-                            <a:srgbClr val="F1F5F9"/>
+                            <a:srgbClr val="FFFFFF"/>
                           </a:solidFill>
                           <a:latin typeface="Segoe UI"/>
                         </a:rPr>
@@ -6425,9 +6452,9 @@
                     <a:lstStyle/>
                     <a:p>
                       <a:r>
-                        <a:rPr sz="950">
+                        <a:rPr sz="950" b="1">
                           <a:solidFill>
-                            <a:srgbClr val="F1F5F9"/>
+                            <a:srgbClr val="FFFFFF"/>
                           </a:solidFill>
                           <a:latin typeface="Segoe UI"/>
                         </a:rPr>
@@ -6515,9 +6542,9 @@
                     <a:lstStyle/>
                     <a:p>
                       <a:r>
-                        <a:rPr sz="950">
+                        <a:rPr sz="950" b="1">
                           <a:solidFill>
-                            <a:srgbClr val="F1F5F9"/>
+                            <a:srgbClr val="FFFFFF"/>
                           </a:solidFill>
                           <a:latin typeface="Segoe UI"/>
                         </a:rPr>
@@ -6605,9 +6632,9 @@
                     <a:lstStyle/>
                     <a:p>
                       <a:r>
-                        <a:rPr sz="950">
+                        <a:rPr sz="950" b="1">
                           <a:solidFill>
-                            <a:srgbClr val="F1F5F9"/>
+                            <a:srgbClr val="FFFFFF"/>
                           </a:solidFill>
                           <a:latin typeface="Segoe UI"/>
                         </a:rPr>
@@ -6695,9 +6722,9 @@
                     <a:lstStyle/>
                     <a:p>
                       <a:r>
-                        <a:rPr sz="950">
+                        <a:rPr sz="950" b="1">
                           <a:solidFill>
-                            <a:srgbClr val="F1F5F9"/>
+                            <a:srgbClr val="FFFFFF"/>
                           </a:solidFill>
                           <a:latin typeface="Segoe UI"/>
                         </a:rPr>
@@ -6785,9 +6812,9 @@
                     <a:lstStyle/>
                     <a:p>
                       <a:r>
-                        <a:rPr sz="950">
+                        <a:rPr sz="950" b="1">
                           <a:solidFill>
-                            <a:srgbClr val="F1F5F9"/>
+                            <a:srgbClr val="FFFFFF"/>
                           </a:solidFill>
                           <a:latin typeface="Segoe UI"/>
                         </a:rPr>
@@ -6875,9 +6902,9 @@
                     <a:lstStyle/>
                     <a:p>
                       <a:r>
-                        <a:rPr sz="950">
+                        <a:rPr sz="950" b="1">
                           <a:solidFill>
-                            <a:srgbClr val="F1F5F9"/>
+                            <a:srgbClr val="FFFFFF"/>
                           </a:solidFill>
                           <a:latin typeface="Segoe UI"/>
                         </a:rPr>
@@ -8330,7 +8357,7 @@
           <a:p>
             <a:pPr>
               <a:spcBef>
-                <a:spcPts val="400"/>
+                <a:spcPts val="300"/>
               </a:spcBef>
             </a:pPr>
             <a:r>
@@ -8342,8 +8369,20 @@
               </a:rPr>
               <a:t>Open showcase/index.html in browser.</a:t>
             </a:r>
-            <a:br/>
-            <a:r>
+          </a:p>
+          <a:p>
+            <a:pPr>
+              <a:spcBef>
+                <a:spcPts val="300"/>
+              </a:spcBef>
+            </a:pPr>
+            <a:r>
+              <a:rPr sz="1000">
+                <a:solidFill>
+                  <a:srgbClr val="F1F5F9"/>
+                </a:solidFill>
+                <a:latin typeface="Segoe UI"/>
+              </a:rPr>
               <a:t>Test 4 clinical scenarios 100% offline.</a:t>
             </a:r>
           </a:p>
@@ -8472,7 +8511,7 @@
           <a:p>
             <a:pPr>
               <a:spcBef>
-                <a:spcPts val="400"/>
+                <a:spcPts val="300"/>
               </a:spcBef>
             </a:pPr>
             <a:r>
@@ -8484,12 +8523,36 @@
               </a:rPr>
               <a:t>Run .\launch_omnicare.ps1</a:t>
             </a:r>
-            <a:br/>
-            <a:r>
+          </a:p>
+          <a:p>
+            <a:pPr>
+              <a:spcBef>
+                <a:spcPts val="300"/>
+              </a:spcBef>
+            </a:pPr>
+            <a:r>
+              <a:rPr sz="1000">
+                <a:solidFill>
+                  <a:srgbClr val="F1F5F9"/>
+                </a:solidFill>
+                <a:latin typeface="Segoe UI"/>
+              </a:rPr>
               <a:t>Open http://localhost:8000/docs</a:t>
             </a:r>
-            <a:br/>
-            <a:r>
+          </a:p>
+          <a:p>
+            <a:pPr>
+              <a:spcBef>
+                <a:spcPts val="300"/>
+              </a:spcBef>
+            </a:pPr>
+            <a:r>
+              <a:rPr sz="1000">
+                <a:solidFill>
+                  <a:srgbClr val="F1F5F9"/>
+                </a:solidFill>
+                <a:latin typeface="Segoe UI"/>
+              </a:rPr>
               <a:t>Open frontend/index.html</a:t>
             </a:r>
           </a:p>
@@ -8618,7 +8681,7 @@
           <a:p>
             <a:pPr>
               <a:spcBef>
-                <a:spcPts val="400"/>
+                <a:spcPts val="300"/>
               </a:spcBef>
             </a:pPr>
             <a:r>
@@ -8630,8 +8693,20 @@
               </a:rPr>
               <a:t>python verify_all.py</a:t>
             </a:r>
-            <a:br/>
-            <a:r>
+          </a:p>
+          <a:p>
+            <a:pPr>
+              <a:spcBef>
+                <a:spcPts val="300"/>
+              </a:spcBef>
+            </a:pPr>
+            <a:r>
+              <a:rPr sz="1000">
+                <a:solidFill>
+                  <a:srgbClr val="F1F5F9"/>
+                </a:solidFill>
+                <a:latin typeface="Segoe UI"/>
+              </a:rPr>
               <a:t>All 35 gates pass cleanly (EXIT CODE 0)</a:t>
             </a:r>
           </a:p>
@@ -15523,9 +15598,15 @@
                 </a:solidFill>
                 <a:latin typeface="Segoe UI"/>
               </a:rPr>
-              <a:t>CDSCO SaMD MDR-2017 Class B Aligned:
-</a:t>
-            </a:r>
+              <a:t>CDSCO SaMD MDR-2017 Class B Aligned:</a:t>
+            </a:r>
+          </a:p>
+          <a:p>
+            <a:pPr>
+              <a:spcBef>
+                <a:spcPts val="200"/>
+              </a:spcBef>
+            </a:pPr>
             <a:r>
               <a:rPr sz="950">
                 <a:solidFill>
@@ -15655,9 +15736,15 @@
                 </a:solidFill>
                 <a:latin typeface="Segoe UI"/>
               </a:rPr>
-              <a:t>Emergency Escalation Pathways:
-</a:t>
-            </a:r>
+              <a:t>Emergency Escalation Pathways:</a:t>
+            </a:r>
+          </a:p>
+          <a:p>
+            <a:pPr>
+              <a:spcBef>
+                <a:spcPts val="200"/>
+              </a:spcBef>
+            </a:pPr>
             <a:r>
               <a:rPr sz="950">
                 <a:solidFill>
@@ -15787,9 +15874,15 @@
                 </a:solidFill>
                 <a:latin typeface="Segoe UI"/>
               </a:rPr>
-              <a:t>Multilingual Voice Dictation:
-</a:t>
-            </a:r>
+              <a:t>Multilingual Voice Dictation:</a:t>
+            </a:r>
+          </a:p>
+          <a:p>
+            <a:pPr>
+              <a:spcBef>
+                <a:spcPts val="200"/>
+              </a:spcBef>
+            </a:pPr>
             <a:r>
               <a:rPr sz="950">
                 <a:solidFill>
@@ -15919,9 +16012,15 @@
                 </a:solidFill>
                 <a:latin typeface="Segoe UI"/>
               </a:rPr>
-              <a:t>Automated SOAP Notes:
-</a:t>
-            </a:r>
+              <a:t>Automated SOAP Notes:</a:t>
+            </a:r>
+          </a:p>
+          <a:p>
+            <a:pPr>
+              <a:spcBef>
+                <a:spcPts val="200"/>
+              </a:spcBef>
+            </a:pPr>
             <a:r>
               <a:rPr sz="950">
                 <a:solidFill>
@@ -19148,13 +19247,13 @@
               </a:spcBef>
             </a:pPr>
             <a:r>
-              <a:rPr b="1" sz="1000">
+              <a:rPr b="1" sz="1100">
                 <a:solidFill>
                   <a:srgbClr val="10B981"/>
                 </a:solidFill>
                 <a:latin typeface="Segoe UI"/>
               </a:rPr>
-              <a:t>✓ </a:t>
+              <a:t>• </a:t>
             </a:r>
             <a:r>
               <a:rPr sz="1000">
@@ -19173,13 +19272,13 @@
               </a:spcBef>
             </a:pPr>
             <a:r>
-              <a:rPr b="1" sz="1000">
+              <a:rPr b="1" sz="1100">
                 <a:solidFill>
                   <a:srgbClr val="10B981"/>
                 </a:solidFill>
                 <a:latin typeface="Segoe UI"/>
               </a:rPr>
-              <a:t>✓ </a:t>
+              <a:t>• </a:t>
             </a:r>
             <a:r>
               <a:rPr sz="1000">
@@ -19198,13 +19297,13 @@
               </a:spcBef>
             </a:pPr>
             <a:r>
-              <a:rPr b="1" sz="1000">
+              <a:rPr b="1" sz="1100">
                 <a:solidFill>
                   <a:srgbClr val="10B981"/>
                 </a:solidFill>
                 <a:latin typeface="Segoe UI"/>
               </a:rPr>
-              <a:t>✓ </a:t>
+              <a:t>• </a:t>
             </a:r>
             <a:r>
               <a:rPr sz="1000">
@@ -19223,13 +19322,13 @@
               </a:spcBef>
             </a:pPr>
             <a:r>
-              <a:rPr b="1" sz="1000">
+              <a:rPr b="1" sz="1100">
                 <a:solidFill>
                   <a:srgbClr val="10B981"/>
                 </a:solidFill>
                 <a:latin typeface="Segoe UI"/>
               </a:rPr>
-              <a:t>✓ </a:t>
+              <a:t>• </a:t>
             </a:r>
             <a:r>
               <a:rPr sz="1000">
